--- a/Day1_Probability/FW536_Day1_Morning_intro to probability.pptx
+++ b/Day1_Probability/FW536_Day1_Morning_intro to probability.pptx
@@ -11,7 +11,7 @@
     <p:sldId id="257" r:id="rId2"/>
     <p:sldId id="336" r:id="rId3"/>
     <p:sldId id="259" r:id="rId4"/>
-    <p:sldId id="341" r:id="rId5"/>
+    <p:sldId id="343" r:id="rId5"/>
     <p:sldId id="307" r:id="rId6"/>
     <p:sldId id="262" r:id="rId7"/>
     <p:sldId id="263" r:id="rId8"/>
@@ -252,7 +252,7 @@
           <a:p>
             <a:fld id="{078FFA9F-E4FE-2949-B991-E9E1D16A3A2F}" type="datetimeFigureOut">
               <a:rPr lang="en-US" smtClean="0"/>
-              <a:t>9/19/25</a:t>
+              <a:t>9/13/26</a:t>
             </a:fld>
             <a:endParaRPr lang="en-US"/>
           </a:p>
@@ -574,7 +574,7 @@
               </a14:hiddenEffects>
             </a:ext>
             <a:ext uri="{FAA26D3D-D897-4be2-8F04-BA451C77F1D7}">
-              <ma14:placeholderFlag xmlns="" xmlns:ma14="http://schemas.microsoft.com/office/mac/drawingml/2011/main" val="1"/>
+              <ma14:placeholderFlag xmlns:ma14="http://schemas.microsoft.com/office/mac/drawingml/2011/main" xmlns="" val="1"/>
             </a:ext>
           </a:extLst>
         </p:spPr>
@@ -659,7 +659,7 @@
               </a14:hiddenEffects>
             </a:ext>
             <a:ext uri="{FAA26D3D-D897-4be2-8F04-BA451C77F1D7}">
-              <ma14:placeholderFlag xmlns="" xmlns:ma14="http://schemas.microsoft.com/office/mac/drawingml/2011/main" val="1"/>
+              <ma14:placeholderFlag xmlns:ma14="http://schemas.microsoft.com/office/mac/drawingml/2011/main" xmlns="" val="1"/>
             </a:ext>
           </a:extLst>
         </p:spPr>
@@ -744,7 +744,7 @@
               </a14:hiddenEffects>
             </a:ext>
             <a:ext uri="{FAA26D3D-D897-4be2-8F04-BA451C77F1D7}">
-              <ma14:placeholderFlag xmlns="" xmlns:ma14="http://schemas.microsoft.com/office/mac/drawingml/2011/main" val="1"/>
+              <ma14:placeholderFlag xmlns:ma14="http://schemas.microsoft.com/office/mac/drawingml/2011/main" xmlns="" val="1"/>
             </a:ext>
           </a:extLst>
         </p:spPr>
@@ -829,7 +829,7 @@
               </a14:hiddenEffects>
             </a:ext>
             <a:ext uri="{FAA26D3D-D897-4be2-8F04-BA451C77F1D7}">
-              <ma14:placeholderFlag xmlns="" xmlns:ma14="http://schemas.microsoft.com/office/mac/drawingml/2011/main" val="1"/>
+              <ma14:placeholderFlag xmlns:ma14="http://schemas.microsoft.com/office/mac/drawingml/2011/main" xmlns="" val="1"/>
             </a:ext>
           </a:extLst>
         </p:spPr>
@@ -914,7 +914,7 @@
               </a14:hiddenEffects>
             </a:ext>
             <a:ext uri="{FAA26D3D-D897-4be2-8F04-BA451C77F1D7}">
-              <ma14:placeholderFlag xmlns="" xmlns:ma14="http://schemas.microsoft.com/office/mac/drawingml/2011/main" val="1"/>
+              <ma14:placeholderFlag xmlns:ma14="http://schemas.microsoft.com/office/mac/drawingml/2011/main" xmlns="" val="1"/>
             </a:ext>
           </a:extLst>
         </p:spPr>
@@ -999,7 +999,7 @@
               </a14:hiddenEffects>
             </a:ext>
             <a:ext uri="{FAA26D3D-D897-4be2-8F04-BA451C77F1D7}">
-              <ma14:placeholderFlag xmlns="" xmlns:ma14="http://schemas.microsoft.com/office/mac/drawingml/2011/main" val="1"/>
+              <ma14:placeholderFlag xmlns:ma14="http://schemas.microsoft.com/office/mac/drawingml/2011/main" xmlns="" val="1"/>
             </a:ext>
           </a:extLst>
         </p:spPr>
@@ -1084,7 +1084,7 @@
               </a14:hiddenEffects>
             </a:ext>
             <a:ext uri="{FAA26D3D-D897-4be2-8F04-BA451C77F1D7}">
-              <ma14:placeholderFlag xmlns="" xmlns:ma14="http://schemas.microsoft.com/office/mac/drawingml/2011/main" val="1"/>
+              <ma14:placeholderFlag xmlns:ma14="http://schemas.microsoft.com/office/mac/drawingml/2011/main" xmlns="" val="1"/>
             </a:ext>
           </a:extLst>
         </p:spPr>
@@ -1169,7 +1169,7 @@
               </a14:hiddenEffects>
             </a:ext>
             <a:ext uri="{FAA26D3D-D897-4be2-8F04-BA451C77F1D7}">
-              <ma14:placeholderFlag xmlns="" xmlns:ma14="http://schemas.microsoft.com/office/mac/drawingml/2011/main" val="1"/>
+              <ma14:placeholderFlag xmlns:ma14="http://schemas.microsoft.com/office/mac/drawingml/2011/main" xmlns="" val="1"/>
             </a:ext>
           </a:extLst>
         </p:spPr>
@@ -1254,7 +1254,7 @@
               </a14:hiddenEffects>
             </a:ext>
             <a:ext uri="{FAA26D3D-D897-4be2-8F04-BA451C77F1D7}">
-              <ma14:placeholderFlag xmlns="" xmlns:ma14="http://schemas.microsoft.com/office/mac/drawingml/2011/main" val="1"/>
+              <ma14:placeholderFlag xmlns:ma14="http://schemas.microsoft.com/office/mac/drawingml/2011/main" xmlns="" val="1"/>
             </a:ext>
           </a:extLst>
         </p:spPr>
@@ -1339,7 +1339,7 @@
               </a14:hiddenEffects>
             </a:ext>
             <a:ext uri="{FAA26D3D-D897-4be2-8F04-BA451C77F1D7}">
-              <ma14:placeholderFlag xmlns="" xmlns:ma14="http://schemas.microsoft.com/office/mac/drawingml/2011/main" val="1"/>
+              <ma14:placeholderFlag xmlns:ma14="http://schemas.microsoft.com/office/mac/drawingml/2011/main" xmlns="" val="1"/>
             </a:ext>
           </a:extLst>
         </p:spPr>
@@ -1424,7 +1424,7 @@
               </a14:hiddenEffects>
             </a:ext>
             <a:ext uri="{FAA26D3D-D897-4be2-8F04-BA451C77F1D7}">
-              <ma14:placeholderFlag xmlns="" xmlns:ma14="http://schemas.microsoft.com/office/mac/drawingml/2011/main" val="1"/>
+              <ma14:placeholderFlag xmlns:ma14="http://schemas.microsoft.com/office/mac/drawingml/2011/main" xmlns="" val="1"/>
             </a:ext>
           </a:extLst>
         </p:spPr>
@@ -1509,7 +1509,7 @@
               </a14:hiddenEffects>
             </a:ext>
             <a:ext uri="{FAA26D3D-D897-4be2-8F04-BA451C77F1D7}">
-              <ma14:placeholderFlag xmlns="" xmlns:ma14="http://schemas.microsoft.com/office/mac/drawingml/2011/main" val="1"/>
+              <ma14:placeholderFlag xmlns:ma14="http://schemas.microsoft.com/office/mac/drawingml/2011/main" xmlns="" val="1"/>
             </a:ext>
           </a:extLst>
         </p:spPr>
@@ -1594,7 +1594,7 @@
               </a14:hiddenEffects>
             </a:ext>
             <a:ext uri="{FAA26D3D-D897-4be2-8F04-BA451C77F1D7}">
-              <ma14:placeholderFlag xmlns="" xmlns:ma14="http://schemas.microsoft.com/office/mac/drawingml/2011/main" val="1"/>
+              <ma14:placeholderFlag xmlns:ma14="http://schemas.microsoft.com/office/mac/drawingml/2011/main" xmlns="" val="1"/>
             </a:ext>
           </a:extLst>
         </p:spPr>
@@ -1679,7 +1679,7 @@
               </a14:hiddenEffects>
             </a:ext>
             <a:ext uri="{FAA26D3D-D897-4be2-8F04-BA451C77F1D7}">
-              <ma14:placeholderFlag xmlns="" xmlns:ma14="http://schemas.microsoft.com/office/mac/drawingml/2011/main" val="1"/>
+              <ma14:placeholderFlag xmlns:ma14="http://schemas.microsoft.com/office/mac/drawingml/2011/main" xmlns="" val="1"/>
             </a:ext>
           </a:extLst>
         </p:spPr>
@@ -1764,7 +1764,7 @@
               </a14:hiddenEffects>
             </a:ext>
             <a:ext uri="{FAA26D3D-D897-4be2-8F04-BA451C77F1D7}">
-              <ma14:placeholderFlag xmlns="" xmlns:ma14="http://schemas.microsoft.com/office/mac/drawingml/2011/main" val="1"/>
+              <ma14:placeholderFlag xmlns:ma14="http://schemas.microsoft.com/office/mac/drawingml/2011/main" xmlns="" val="1"/>
             </a:ext>
           </a:extLst>
         </p:spPr>
@@ -1849,7 +1849,7 @@
               </a14:hiddenEffects>
             </a:ext>
             <a:ext uri="{FAA26D3D-D897-4be2-8F04-BA451C77F1D7}">
-              <ma14:placeholderFlag xmlns="" xmlns:ma14="http://schemas.microsoft.com/office/mac/drawingml/2011/main" val="1"/>
+              <ma14:placeholderFlag xmlns:ma14="http://schemas.microsoft.com/office/mac/drawingml/2011/main" xmlns="" val="1"/>
             </a:ext>
           </a:extLst>
         </p:spPr>
@@ -1934,7 +1934,7 @@
               </a14:hiddenEffects>
             </a:ext>
             <a:ext uri="{FAA26D3D-D897-4be2-8F04-BA451C77F1D7}">
-              <ma14:placeholderFlag xmlns="" xmlns:ma14="http://schemas.microsoft.com/office/mac/drawingml/2011/main" val="1"/>
+              <ma14:placeholderFlag xmlns:ma14="http://schemas.microsoft.com/office/mac/drawingml/2011/main" xmlns="" val="1"/>
             </a:ext>
           </a:extLst>
         </p:spPr>
@@ -2019,7 +2019,7 @@
               </a14:hiddenEffects>
             </a:ext>
             <a:ext uri="{FAA26D3D-D897-4be2-8F04-BA451C77F1D7}">
-              <ma14:placeholderFlag xmlns="" xmlns:ma14="http://schemas.microsoft.com/office/mac/drawingml/2011/main" val="1"/>
+              <ma14:placeholderFlag xmlns:ma14="http://schemas.microsoft.com/office/mac/drawingml/2011/main" xmlns="" val="1"/>
             </a:ext>
           </a:extLst>
         </p:spPr>
@@ -2104,7 +2104,7 @@
               </a14:hiddenEffects>
             </a:ext>
             <a:ext uri="{FAA26D3D-D897-4be2-8F04-BA451C77F1D7}">
-              <ma14:placeholderFlag xmlns="" xmlns:ma14="http://schemas.microsoft.com/office/mac/drawingml/2011/main" val="1"/>
+              <ma14:placeholderFlag xmlns:ma14="http://schemas.microsoft.com/office/mac/drawingml/2011/main" xmlns="" val="1"/>
             </a:ext>
           </a:extLst>
         </p:spPr>
@@ -2390,7 +2390,7 @@
               </a14:hiddenEffects>
             </a:ext>
             <a:ext uri="{FAA26D3D-D897-4be2-8F04-BA451C77F1D7}">
-              <ma14:placeholderFlag xmlns="" xmlns:ma14="http://schemas.microsoft.com/office/mac/drawingml/2011/main" val="1"/>
+              <ma14:placeholderFlag xmlns:ma14="http://schemas.microsoft.com/office/mac/drawingml/2011/main" xmlns="" val="1"/>
             </a:ext>
           </a:extLst>
         </p:spPr>
@@ -3078,7 +3078,7 @@
               </a14:hiddenEffects>
             </a:ext>
             <a:ext uri="{FAA26D3D-D897-4be2-8F04-BA451C77F1D7}">
-              <ma14:placeholderFlag xmlns:ma14="http://schemas.microsoft.com/office/mac/drawingml/2011/main" xmlns="" val="1"/>
+              <ma14:placeholderFlag xmlns="" xmlns:ma14="http://schemas.microsoft.com/office/mac/drawingml/2011/main" val="1"/>
             </a:ext>
           </a:extLst>
         </p:spPr>
@@ -3354,7 +3354,7 @@
               </a14:hiddenEffects>
             </a:ext>
             <a:ext uri="{FAA26D3D-D897-4be2-8F04-BA451C77F1D7}">
-              <ma14:placeholderFlag xmlns:ma14="http://schemas.microsoft.com/office/mac/drawingml/2011/main" xmlns="" val="1"/>
+              <ma14:placeholderFlag xmlns="" xmlns:ma14="http://schemas.microsoft.com/office/mac/drawingml/2011/main" val="1"/>
             </a:ext>
           </a:extLst>
         </p:spPr>
@@ -3439,7 +3439,7 @@
               </a14:hiddenEffects>
             </a:ext>
             <a:ext uri="{FAA26D3D-D897-4be2-8F04-BA451C77F1D7}">
-              <ma14:placeholderFlag xmlns="" xmlns:ma14="http://schemas.microsoft.com/office/mac/drawingml/2011/main" val="1"/>
+              <ma14:placeholderFlag xmlns:ma14="http://schemas.microsoft.com/office/mac/drawingml/2011/main" xmlns="" val="1"/>
             </a:ext>
           </a:extLst>
         </p:spPr>
@@ -3524,7 +3524,7 @@
               </a14:hiddenEffects>
             </a:ext>
             <a:ext uri="{FAA26D3D-D897-4be2-8F04-BA451C77F1D7}">
-              <ma14:placeholderFlag xmlns="" xmlns:ma14="http://schemas.microsoft.com/office/mac/drawingml/2011/main" val="1"/>
+              <ma14:placeholderFlag xmlns:ma14="http://schemas.microsoft.com/office/mac/drawingml/2011/main" xmlns="" val="1"/>
             </a:ext>
           </a:extLst>
         </p:spPr>
@@ -3683,7 +3683,7 @@
           <a:p>
             <a:fld id="{FC959C97-01B5-694B-9820-37B576367CF4}" type="datetimeFigureOut">
               <a:rPr lang="en-US" smtClean="0"/>
-              <a:t>9/19/25</a:t>
+              <a:t>9/13/26</a:t>
             </a:fld>
             <a:endParaRPr lang="en-US"/>
           </a:p>
@@ -3851,7 +3851,7 @@
           <a:p>
             <a:fld id="{FC959C97-01B5-694B-9820-37B576367CF4}" type="datetimeFigureOut">
               <a:rPr lang="en-US" smtClean="0"/>
-              <a:t>9/19/25</a:t>
+              <a:t>9/13/26</a:t>
             </a:fld>
             <a:endParaRPr lang="en-US"/>
           </a:p>
@@ -4029,7 +4029,7 @@
           <a:p>
             <a:fld id="{FC959C97-01B5-694B-9820-37B576367CF4}" type="datetimeFigureOut">
               <a:rPr lang="en-US" smtClean="0"/>
-              <a:t>9/19/25</a:t>
+              <a:t>9/13/26</a:t>
             </a:fld>
             <a:endParaRPr lang="en-US"/>
           </a:p>
@@ -4954,7 +4954,7 @@
           <a:p>
             <a:fld id="{FC959C97-01B5-694B-9820-37B576367CF4}" type="datetimeFigureOut">
               <a:rPr lang="en-US" smtClean="0"/>
-              <a:t>9/19/25</a:t>
+              <a:t>9/13/26</a:t>
             </a:fld>
             <a:endParaRPr lang="en-US"/>
           </a:p>
@@ -5199,7 +5199,7 @@
           <a:p>
             <a:fld id="{FC959C97-01B5-694B-9820-37B576367CF4}" type="datetimeFigureOut">
               <a:rPr lang="en-US" smtClean="0"/>
-              <a:t>9/19/25</a:t>
+              <a:t>9/13/26</a:t>
             </a:fld>
             <a:endParaRPr lang="en-US"/>
           </a:p>
@@ -5428,7 +5428,7 @@
           <a:p>
             <a:fld id="{FC959C97-01B5-694B-9820-37B576367CF4}" type="datetimeFigureOut">
               <a:rPr lang="en-US" smtClean="0"/>
-              <a:t>9/19/25</a:t>
+              <a:t>9/13/26</a:t>
             </a:fld>
             <a:endParaRPr lang="en-US"/>
           </a:p>
@@ -5792,7 +5792,7 @@
           <a:p>
             <a:fld id="{FC959C97-01B5-694B-9820-37B576367CF4}" type="datetimeFigureOut">
               <a:rPr lang="en-US" smtClean="0"/>
-              <a:t>9/19/25</a:t>
+              <a:t>9/13/26</a:t>
             </a:fld>
             <a:endParaRPr lang="en-US"/>
           </a:p>
@@ -5909,7 +5909,7 @@
           <a:p>
             <a:fld id="{FC959C97-01B5-694B-9820-37B576367CF4}" type="datetimeFigureOut">
               <a:rPr lang="en-US" smtClean="0"/>
-              <a:t>9/19/25</a:t>
+              <a:t>9/13/26</a:t>
             </a:fld>
             <a:endParaRPr lang="en-US"/>
           </a:p>
@@ -6004,7 +6004,7 @@
           <a:p>
             <a:fld id="{FC959C97-01B5-694B-9820-37B576367CF4}" type="datetimeFigureOut">
               <a:rPr lang="en-US" smtClean="0"/>
-              <a:t>9/19/25</a:t>
+              <a:t>9/13/26</a:t>
             </a:fld>
             <a:endParaRPr lang="en-US"/>
           </a:p>
@@ -6279,7 +6279,7 @@
           <a:p>
             <a:fld id="{FC959C97-01B5-694B-9820-37B576367CF4}" type="datetimeFigureOut">
               <a:rPr lang="en-US" smtClean="0"/>
-              <a:t>9/19/25</a:t>
+              <a:t>9/13/26</a:t>
             </a:fld>
             <a:endParaRPr lang="en-US"/>
           </a:p>
@@ -6531,7 +6531,7 @@
           <a:p>
             <a:fld id="{FC959C97-01B5-694B-9820-37B576367CF4}" type="datetimeFigureOut">
               <a:rPr lang="en-US" smtClean="0"/>
-              <a:t>9/19/25</a:t>
+              <a:t>9/13/26</a:t>
             </a:fld>
             <a:endParaRPr lang="en-US"/>
           </a:p>
@@ -6742,7 +6742,7 @@
           <a:p>
             <a:fld id="{FC959C97-01B5-694B-9820-37B576367CF4}" type="datetimeFigureOut">
               <a:rPr lang="en-US" smtClean="0"/>
-              <a:t>9/19/25</a:t>
+              <a:t>9/13/26</a:t>
             </a:fld>
             <a:endParaRPr lang="en-US"/>
           </a:p>
@@ -37414,7 +37414,7 @@
               </a14:hiddenEffects>
             </a:ext>
             <a:ext uri="{FAA26D3D-D897-4be2-8F04-BA451C77F1D7}">
-              <ma14:placeholderFlag xmlns:ma14="http://schemas.microsoft.com/office/mac/drawingml/2011/main" xmlns="" val="1"/>
+              <ma14:placeholderFlag xmlns="" xmlns:ma14="http://schemas.microsoft.com/office/mac/drawingml/2011/main" val="1"/>
             </a:ext>
           </a:extLst>
         </p:spPr>
@@ -37560,25 +37560,9 @@
                   <a:schemeClr val="tx1"/>
                 </a:solidFill>
                 <a:latin typeface="Arial" charset="0"/>
-                <a:ea typeface="Arial" charset="0"/>
                 <a:cs typeface="Arial" charset="0"/>
               </a:rPr>
-              <a:t>Pre-course exam (50 points, scored generously)</a:t>
-            </a:r>
-          </a:p>
-          <a:p>
-            <a:pPr algn="ctr" eaLnBrk="1" hangingPunct="1">
-              <a:defRPr/>
-            </a:pPr>
-            <a:r>
-              <a:rPr lang="en-US" altLang="en-US" sz="3200" kern="0" dirty="0">
-                <a:solidFill>
-                  <a:schemeClr val="tx1"/>
-                </a:solidFill>
-                <a:latin typeface="Arial" charset="0"/>
-                <a:cs typeface="Arial" charset="0"/>
-              </a:rPr>
-              <a:t>Nine problem sets, one per session (20 points each, 180 points)</a:t>
+              <a:t>Labs (180 points)</a:t>
             </a:r>
             <a:endParaRPr lang="en-AU" altLang="en-US" sz="3200" kern="0" dirty="0">
               <a:solidFill>
@@ -37591,7 +37575,7 @@
     </p:spTree>
     <p:extLst>
       <p:ext uri="{BB962C8B-B14F-4D97-AF65-F5344CB8AC3E}">
-        <p14:creationId xmlns:p14="http://schemas.microsoft.com/office/powerpoint/2010/main" val="2712359552"/>
+        <p14:creationId xmlns:p14="http://schemas.microsoft.com/office/powerpoint/2010/main" val="4144808605"/>
       </p:ext>
     </p:extLst>
   </p:cSld>

--- a/Day1_Probability/FW536_Day1_Morning_intro to probability.pptx
+++ b/Day1_Probability/FW536_Day1_Morning_intro to probability.pptx
@@ -8,7 +8,7 @@
     <p:notesMasterId r:id="rId58"/>
   </p:notesMasterIdLst>
   <p:sldIdLst>
-    <p:sldId id="257" r:id="rId2"/>
+    <p:sldId id="342" r:id="rId2"/>
     <p:sldId id="336" r:id="rId3"/>
     <p:sldId id="259" r:id="rId4"/>
     <p:sldId id="343" r:id="rId5"/>
@@ -574,7 +574,7 @@
               </a14:hiddenEffects>
             </a:ext>
             <a:ext uri="{FAA26D3D-D897-4be2-8F04-BA451C77F1D7}">
-              <ma14:placeholderFlag xmlns:ma14="http://schemas.microsoft.com/office/mac/drawingml/2011/main" xmlns="" val="1"/>
+              <ma14:placeholderFlag xmlns="" xmlns:ma14="http://schemas.microsoft.com/office/mac/drawingml/2011/main" val="1"/>
             </a:ext>
           </a:extLst>
         </p:spPr>
@@ -659,7 +659,7 @@
               </a14:hiddenEffects>
             </a:ext>
             <a:ext uri="{FAA26D3D-D897-4be2-8F04-BA451C77F1D7}">
-              <ma14:placeholderFlag xmlns:ma14="http://schemas.microsoft.com/office/mac/drawingml/2011/main" xmlns="" val="1"/>
+              <ma14:placeholderFlag xmlns="" xmlns:ma14="http://schemas.microsoft.com/office/mac/drawingml/2011/main" val="1"/>
             </a:ext>
           </a:extLst>
         </p:spPr>
@@ -744,7 +744,7 @@
               </a14:hiddenEffects>
             </a:ext>
             <a:ext uri="{FAA26D3D-D897-4be2-8F04-BA451C77F1D7}">
-              <ma14:placeholderFlag xmlns:ma14="http://schemas.microsoft.com/office/mac/drawingml/2011/main" xmlns="" val="1"/>
+              <ma14:placeholderFlag xmlns="" xmlns:ma14="http://schemas.microsoft.com/office/mac/drawingml/2011/main" val="1"/>
             </a:ext>
           </a:extLst>
         </p:spPr>
@@ -829,7 +829,7 @@
               </a14:hiddenEffects>
             </a:ext>
             <a:ext uri="{FAA26D3D-D897-4be2-8F04-BA451C77F1D7}">
-              <ma14:placeholderFlag xmlns:ma14="http://schemas.microsoft.com/office/mac/drawingml/2011/main" xmlns="" val="1"/>
+              <ma14:placeholderFlag xmlns="" xmlns:ma14="http://schemas.microsoft.com/office/mac/drawingml/2011/main" val="1"/>
             </a:ext>
           </a:extLst>
         </p:spPr>
@@ -914,7 +914,7 @@
               </a14:hiddenEffects>
             </a:ext>
             <a:ext uri="{FAA26D3D-D897-4be2-8F04-BA451C77F1D7}">
-              <ma14:placeholderFlag xmlns:ma14="http://schemas.microsoft.com/office/mac/drawingml/2011/main" xmlns="" val="1"/>
+              <ma14:placeholderFlag xmlns="" xmlns:ma14="http://schemas.microsoft.com/office/mac/drawingml/2011/main" val="1"/>
             </a:ext>
           </a:extLst>
         </p:spPr>
@@ -999,7 +999,7 @@
               </a14:hiddenEffects>
             </a:ext>
             <a:ext uri="{FAA26D3D-D897-4be2-8F04-BA451C77F1D7}">
-              <ma14:placeholderFlag xmlns:ma14="http://schemas.microsoft.com/office/mac/drawingml/2011/main" xmlns="" val="1"/>
+              <ma14:placeholderFlag xmlns="" xmlns:ma14="http://schemas.microsoft.com/office/mac/drawingml/2011/main" val="1"/>
             </a:ext>
           </a:extLst>
         </p:spPr>
@@ -1084,7 +1084,7 @@
               </a14:hiddenEffects>
             </a:ext>
             <a:ext uri="{FAA26D3D-D897-4be2-8F04-BA451C77F1D7}">
-              <ma14:placeholderFlag xmlns:ma14="http://schemas.microsoft.com/office/mac/drawingml/2011/main" xmlns="" val="1"/>
+              <ma14:placeholderFlag xmlns="" xmlns:ma14="http://schemas.microsoft.com/office/mac/drawingml/2011/main" val="1"/>
             </a:ext>
           </a:extLst>
         </p:spPr>
@@ -1169,7 +1169,7 @@
               </a14:hiddenEffects>
             </a:ext>
             <a:ext uri="{FAA26D3D-D897-4be2-8F04-BA451C77F1D7}">
-              <ma14:placeholderFlag xmlns:ma14="http://schemas.microsoft.com/office/mac/drawingml/2011/main" xmlns="" val="1"/>
+              <ma14:placeholderFlag xmlns="" xmlns:ma14="http://schemas.microsoft.com/office/mac/drawingml/2011/main" val="1"/>
             </a:ext>
           </a:extLst>
         </p:spPr>
@@ -1254,7 +1254,7 @@
               </a14:hiddenEffects>
             </a:ext>
             <a:ext uri="{FAA26D3D-D897-4be2-8F04-BA451C77F1D7}">
-              <ma14:placeholderFlag xmlns:ma14="http://schemas.microsoft.com/office/mac/drawingml/2011/main" xmlns="" val="1"/>
+              <ma14:placeholderFlag xmlns="" xmlns:ma14="http://schemas.microsoft.com/office/mac/drawingml/2011/main" val="1"/>
             </a:ext>
           </a:extLst>
         </p:spPr>
@@ -1339,7 +1339,7 @@
               </a14:hiddenEffects>
             </a:ext>
             <a:ext uri="{FAA26D3D-D897-4be2-8F04-BA451C77F1D7}">
-              <ma14:placeholderFlag xmlns:ma14="http://schemas.microsoft.com/office/mac/drawingml/2011/main" xmlns="" val="1"/>
+              <ma14:placeholderFlag xmlns="" xmlns:ma14="http://schemas.microsoft.com/office/mac/drawingml/2011/main" val="1"/>
             </a:ext>
           </a:extLst>
         </p:spPr>
@@ -1424,7 +1424,7 @@
               </a14:hiddenEffects>
             </a:ext>
             <a:ext uri="{FAA26D3D-D897-4be2-8F04-BA451C77F1D7}">
-              <ma14:placeholderFlag xmlns:ma14="http://schemas.microsoft.com/office/mac/drawingml/2011/main" xmlns="" val="1"/>
+              <ma14:placeholderFlag xmlns="" xmlns:ma14="http://schemas.microsoft.com/office/mac/drawingml/2011/main" val="1"/>
             </a:ext>
           </a:extLst>
         </p:spPr>
@@ -1509,7 +1509,7 @@
               </a14:hiddenEffects>
             </a:ext>
             <a:ext uri="{FAA26D3D-D897-4be2-8F04-BA451C77F1D7}">
-              <ma14:placeholderFlag xmlns:ma14="http://schemas.microsoft.com/office/mac/drawingml/2011/main" xmlns="" val="1"/>
+              <ma14:placeholderFlag xmlns="" xmlns:ma14="http://schemas.microsoft.com/office/mac/drawingml/2011/main" val="1"/>
             </a:ext>
           </a:extLst>
         </p:spPr>
@@ -1594,7 +1594,7 @@
               </a14:hiddenEffects>
             </a:ext>
             <a:ext uri="{FAA26D3D-D897-4be2-8F04-BA451C77F1D7}">
-              <ma14:placeholderFlag xmlns:ma14="http://schemas.microsoft.com/office/mac/drawingml/2011/main" xmlns="" val="1"/>
+              <ma14:placeholderFlag xmlns="" xmlns:ma14="http://schemas.microsoft.com/office/mac/drawingml/2011/main" val="1"/>
             </a:ext>
           </a:extLst>
         </p:spPr>
@@ -1679,7 +1679,7 @@
               </a14:hiddenEffects>
             </a:ext>
             <a:ext uri="{FAA26D3D-D897-4be2-8F04-BA451C77F1D7}">
-              <ma14:placeholderFlag xmlns:ma14="http://schemas.microsoft.com/office/mac/drawingml/2011/main" xmlns="" val="1"/>
+              <ma14:placeholderFlag xmlns="" xmlns:ma14="http://schemas.microsoft.com/office/mac/drawingml/2011/main" val="1"/>
             </a:ext>
           </a:extLst>
         </p:spPr>
@@ -1764,7 +1764,7 @@
               </a14:hiddenEffects>
             </a:ext>
             <a:ext uri="{FAA26D3D-D897-4be2-8F04-BA451C77F1D7}">
-              <ma14:placeholderFlag xmlns:ma14="http://schemas.microsoft.com/office/mac/drawingml/2011/main" xmlns="" val="1"/>
+              <ma14:placeholderFlag xmlns="" xmlns:ma14="http://schemas.microsoft.com/office/mac/drawingml/2011/main" val="1"/>
             </a:ext>
           </a:extLst>
         </p:spPr>
@@ -1849,7 +1849,7 @@
               </a14:hiddenEffects>
             </a:ext>
             <a:ext uri="{FAA26D3D-D897-4be2-8F04-BA451C77F1D7}">
-              <ma14:placeholderFlag xmlns:ma14="http://schemas.microsoft.com/office/mac/drawingml/2011/main" xmlns="" val="1"/>
+              <ma14:placeholderFlag xmlns="" xmlns:ma14="http://schemas.microsoft.com/office/mac/drawingml/2011/main" val="1"/>
             </a:ext>
           </a:extLst>
         </p:spPr>
@@ -1934,7 +1934,7 @@
               </a14:hiddenEffects>
             </a:ext>
             <a:ext uri="{FAA26D3D-D897-4be2-8F04-BA451C77F1D7}">
-              <ma14:placeholderFlag xmlns:ma14="http://schemas.microsoft.com/office/mac/drawingml/2011/main" xmlns="" val="1"/>
+              <ma14:placeholderFlag xmlns="" xmlns:ma14="http://schemas.microsoft.com/office/mac/drawingml/2011/main" val="1"/>
             </a:ext>
           </a:extLst>
         </p:spPr>
@@ -2019,7 +2019,7 @@
               </a14:hiddenEffects>
             </a:ext>
             <a:ext uri="{FAA26D3D-D897-4be2-8F04-BA451C77F1D7}">
-              <ma14:placeholderFlag xmlns:ma14="http://schemas.microsoft.com/office/mac/drawingml/2011/main" xmlns="" val="1"/>
+              <ma14:placeholderFlag xmlns="" xmlns:ma14="http://schemas.microsoft.com/office/mac/drawingml/2011/main" val="1"/>
             </a:ext>
           </a:extLst>
         </p:spPr>
@@ -2104,7 +2104,7 @@
               </a14:hiddenEffects>
             </a:ext>
             <a:ext uri="{FAA26D3D-D897-4be2-8F04-BA451C77F1D7}">
-              <ma14:placeholderFlag xmlns:ma14="http://schemas.microsoft.com/office/mac/drawingml/2011/main" xmlns="" val="1"/>
+              <ma14:placeholderFlag xmlns="" xmlns:ma14="http://schemas.microsoft.com/office/mac/drawingml/2011/main" val="1"/>
             </a:ext>
           </a:extLst>
         </p:spPr>
@@ -2390,7 +2390,7 @@
               </a14:hiddenEffects>
             </a:ext>
             <a:ext uri="{FAA26D3D-D897-4be2-8F04-BA451C77F1D7}">
-              <ma14:placeholderFlag xmlns:ma14="http://schemas.microsoft.com/office/mac/drawingml/2011/main" xmlns="" val="1"/>
+              <ma14:placeholderFlag xmlns="" xmlns:ma14="http://schemas.microsoft.com/office/mac/drawingml/2011/main" val="1"/>
             </a:ext>
           </a:extLst>
         </p:spPr>
@@ -3078,7 +3078,7 @@
               </a14:hiddenEffects>
             </a:ext>
             <a:ext uri="{FAA26D3D-D897-4be2-8F04-BA451C77F1D7}">
-              <ma14:placeholderFlag xmlns="" xmlns:ma14="http://schemas.microsoft.com/office/mac/drawingml/2011/main" val="1"/>
+              <ma14:placeholderFlag xmlns:ma14="http://schemas.microsoft.com/office/mac/drawingml/2011/main" xmlns="" val="1"/>
             </a:ext>
           </a:extLst>
         </p:spPr>
@@ -3354,7 +3354,7 @@
               </a14:hiddenEffects>
             </a:ext>
             <a:ext uri="{FAA26D3D-D897-4be2-8F04-BA451C77F1D7}">
-              <ma14:placeholderFlag xmlns="" xmlns:ma14="http://schemas.microsoft.com/office/mac/drawingml/2011/main" val="1"/>
+              <ma14:placeholderFlag xmlns:ma14="http://schemas.microsoft.com/office/mac/drawingml/2011/main" xmlns="" val="1"/>
             </a:ext>
           </a:extLst>
         </p:spPr>
@@ -3439,7 +3439,7 @@
               </a14:hiddenEffects>
             </a:ext>
             <a:ext uri="{FAA26D3D-D897-4be2-8F04-BA451C77F1D7}">
-              <ma14:placeholderFlag xmlns:ma14="http://schemas.microsoft.com/office/mac/drawingml/2011/main" xmlns="" val="1"/>
+              <ma14:placeholderFlag xmlns="" xmlns:ma14="http://schemas.microsoft.com/office/mac/drawingml/2011/main" val="1"/>
             </a:ext>
           </a:extLst>
         </p:spPr>
@@ -3524,7 +3524,7 @@
               </a14:hiddenEffects>
             </a:ext>
             <a:ext uri="{FAA26D3D-D897-4be2-8F04-BA451C77F1D7}">
-              <ma14:placeholderFlag xmlns:ma14="http://schemas.microsoft.com/office/mac/drawingml/2011/main" xmlns="" val="1"/>
+              <ma14:placeholderFlag xmlns="" xmlns:ma14="http://schemas.microsoft.com/office/mac/drawingml/2011/main" val="1"/>
             </a:ext>
           </a:extLst>
         </p:spPr>
@@ -7167,7 +7167,9 @@
           </a:xfrm>
         </p:spPr>
         <p:txBody>
-          <a:bodyPr/>
+          <a:bodyPr>
+            <a:normAutofit fontScale="90000"/>
+          </a:bodyPr>
           <a:lstStyle/>
           <a:p>
             <a:pPr algn="ctr" eaLnBrk="1" hangingPunct="1">
@@ -7179,7 +7181,7 @@
                 <a:ea typeface="Arial" charset="0"/>
                 <a:cs typeface="Arial" charset="0"/>
               </a:rPr>
-              <a:t>FW 536 · 2026</a:t>
+              <a:t>FW536 – Statistical modeling for ecology and conservation </a:t>
             </a:r>
             <a:br>
               <a:rPr lang="en-US" altLang="en-US" sz="4000" b="1" dirty="0">
@@ -7201,7 +7203,7 @@
                 <a:ea typeface="Arial" charset="0"/>
                 <a:cs typeface="Arial" charset="0"/>
               </a:rPr>
-              <a:t>Get your data on!</a:t>
+              <a:t>AKA Get your data on!</a:t>
             </a:r>
             <a:endParaRPr lang="en-AU" altLang="en-US" sz="3200" b="1" dirty="0"/>
           </a:p>
@@ -7210,7 +7212,7 @@
     </p:spTree>
     <p:extLst>
       <p:ext uri="{BB962C8B-B14F-4D97-AF65-F5344CB8AC3E}">
-        <p14:creationId xmlns:p14="http://schemas.microsoft.com/office/powerpoint/2010/main" val="926511034"/>
+        <p14:creationId xmlns:p14="http://schemas.microsoft.com/office/powerpoint/2010/main" val="617864679"/>
       </p:ext>
     </p:extLst>
   </p:cSld>
@@ -37414,7 +37416,7 @@
               </a14:hiddenEffects>
             </a:ext>
             <a:ext uri="{FAA26D3D-D897-4be2-8F04-BA451C77F1D7}">
-              <ma14:placeholderFlag xmlns="" xmlns:ma14="http://schemas.microsoft.com/office/mac/drawingml/2011/main" val="1"/>
+              <ma14:placeholderFlag xmlns:ma14="http://schemas.microsoft.com/office/mac/drawingml/2011/main" xmlns="" val="1"/>
             </a:ext>
           </a:extLst>
         </p:spPr>
